--- a/00_Executive_Rollup_Report/AMEX_RiskIQ_Platform_Executive_Rollup_Deck.pptx
+++ b/00_Executive_Rollup_Report/AMEX_RiskIQ_Platform_Executive_Rollup_Deck.pptx
@@ -3236,7 +3236,7 @@
                   <a:srgbClr val="8A93A6"/>
                 </a:solidFill>
               </a:rPr>
-              <a:t>Generated: 2026-09-16 11:06</a:t>
+              <a:t>Generated: 2026-09-16 12:02</a:t>
             </a:r>
           </a:p>
         </p:txBody>
@@ -3527,6 +3527,117 @@
                 </a:solidFill>
               </a:rPr>
               <a:t>4x Independent Reproduction: Pass</a:t>
+            </a:r>
+          </a:p>
+        </p:txBody>
+      </p:sp>
+      <p:sp>
+        <p:nvSpPr>
+          <p:cNvPr id="14" name="Rectangle 13"/>
+          <p:cNvSpPr/>
+          <p:nvPr/>
+        </p:nvSpPr>
+        <p:spPr>
+          <a:xfrm>
+            <a:off x="548640" y="5349240"/>
+            <a:ext cx="11064240" cy="1234440"/>
+          </a:xfrm>
+          <a:prstGeom prst="rect">
+            <a:avLst/>
+          </a:prstGeom>
+          <a:solidFill>
+            <a:srgbClr val="FEF3C7"/>
+          </a:solidFill>
+          <a:ln>
+            <a:noFill/>
+          </a:ln>
+        </p:spPr>
+        <p:style>
+          <a:lnRef idx="1">
+            <a:schemeClr val="accent1"/>
+          </a:lnRef>
+          <a:fillRef idx="3">
+            <a:schemeClr val="accent1"/>
+          </a:fillRef>
+          <a:effectRef idx="2">
+            <a:schemeClr val="accent1"/>
+          </a:effectRef>
+          <a:fontRef idx="minor">
+            <a:schemeClr val="lt1"/>
+          </a:fontRef>
+        </p:style>
+        <p:txBody>
+          <a:bodyPr rtlCol="0" anchor="ctr"/>
+          <a:lstStyle/>
+          <a:p>
+            <a:pPr algn="ctr"/>
+          </a:p>
+        </p:txBody>
+      </p:sp>
+      <p:sp>
+        <p:nvSpPr>
+          <p:cNvPr id="15" name="TextBox 14"/>
+          <p:cNvSpPr txBox="1"/>
+          <p:nvPr/>
+        </p:nvSpPr>
+        <p:spPr>
+          <a:xfrm>
+            <a:off x="777240" y="5440680"/>
+            <a:ext cx="10607040" cy="274320"/>
+          </a:xfrm>
+          <a:prstGeom prst="rect">
+            <a:avLst/>
+          </a:prstGeom>
+          <a:noFill/>
+        </p:spPr>
+        <p:txBody>
+          <a:bodyPr wrap="square">
+            <a:spAutoFit/>
+          </a:bodyPr>
+          <a:lstStyle/>
+          <a:p>
+            <a:pPr algn="l"/>
+            <a:r>
+              <a:rPr sz="1300" b="1">
+                <a:solidFill>
+                  <a:srgbClr val="0B1F3A"/>
+                </a:solidFill>
+              </a:rPr>
+              <a:t>UNAUDITED RESULTS</a:t>
+            </a:r>
+          </a:p>
+        </p:txBody>
+      </p:sp>
+      <p:sp>
+        <p:nvSpPr>
+          <p:cNvPr id="16" name="TextBox 15"/>
+          <p:cNvSpPr txBox="1"/>
+          <p:nvPr/>
+        </p:nvSpPr>
+        <p:spPr>
+          <a:xfrm>
+            <a:off x="777240" y="5715000"/>
+            <a:ext cx="10607040" cy="822960"/>
+          </a:xfrm>
+          <a:prstGeom prst="rect">
+            <a:avLst/>
+          </a:prstGeom>
+          <a:noFill/>
+        </p:spPr>
+        <p:txBody>
+          <a:bodyPr wrap="square">
+            <a:spAutoFit/>
+          </a:bodyPr>
+          <a:lstStyle/>
+          <a:p>
+            <a:pPr algn="l"/>
+            <a:r>
+              <a:rPr sz="900" b="0">
+                <a:solidFill>
+                  <a:srgbClr val="0B1F3A"/>
+                </a:solidFill>
+              </a:rPr>
+              <a:t>UNAUDITED RESULTS -- every figure on this report is a real, computed internal management estimate from this platform's own notebooks, not a certified or externally audited financial statement. Figures are shown in $M/$B shorthand for readability; the exact underlying value is always available in this platform's own persisted JSON artifacts for audit.</a:t>
             </a:r>
           </a:p>
         </p:txBody>
@@ -3557,8 +3668,8 @@
         </p:nvSpPr>
         <p:spPr>
           <a:xfrm>
-            <a:off x="548640" y="320040"/>
-            <a:ext cx="11064240" cy="548640"/>
+            <a:off x="548640" y="274320"/>
+            <a:ext cx="11064240" cy="457200"/>
           </a:xfrm>
           <a:prstGeom prst="rect">
             <a:avLst/>
@@ -3591,8 +3702,8 @@
         </p:nvSpPr>
         <p:spPr>
           <a:xfrm>
-            <a:off x="548640" y="1188720"/>
-            <a:ext cx="3520440" cy="2011680"/>
+            <a:off x="548640" y="868680"/>
+            <a:ext cx="3520440" cy="1600200"/>
           </a:xfrm>
           <a:prstGeom prst="rect">
             <a:avLst/>
@@ -3634,8 +3745,8 @@
         </p:nvSpPr>
         <p:spPr>
           <a:xfrm>
-            <a:off x="731520" y="1325880"/>
-            <a:ext cx="3154680" cy="548640"/>
+            <a:off x="731520" y="978407"/>
+            <a:ext cx="3154680" cy="502920"/>
           </a:xfrm>
           <a:prstGeom prst="rect">
             <a:avLst/>
@@ -3650,7 +3761,7 @@
           <a:p>
             <a:pPr algn="l"/>
             <a:r>
-              <a:rPr sz="1200" b="0">
+              <a:rPr sz="1100" b="0">
                 <a:solidFill>
                   <a:srgbClr val="8A93A6"/>
                 </a:solidFill>
@@ -3668,8 +3779,8 @@
         </p:nvSpPr>
         <p:spPr>
           <a:xfrm>
-            <a:off x="731520" y="1874519"/>
-            <a:ext cx="3154680" cy="822960"/>
+            <a:off x="731520" y="1463040"/>
+            <a:ext cx="3154680" cy="731520"/>
           </a:xfrm>
           <a:prstGeom prst="rect">
             <a:avLst/>
@@ -3684,12 +3795,12 @@
           <a:p>
             <a:pPr algn="l"/>
             <a:r>
-              <a:rPr sz="2400" b="1">
+              <a:rPr sz="2100" b="1">
                 <a:solidFill>
                   <a:srgbClr val="C9A227"/>
                 </a:solidFill>
               </a:rPr>
-              <a:t>$432,132,849</a:t>
+              <a:t>$432.13M</a:t>
             </a:r>
           </a:p>
         </p:txBody>
@@ -3702,8 +3813,8 @@
         </p:nvSpPr>
         <p:spPr>
           <a:xfrm>
-            <a:off x="4343400" y="1188720"/>
-            <a:ext cx="3520440" cy="2011680"/>
+            <a:off x="4343400" y="868680"/>
+            <a:ext cx="3520440" cy="1600200"/>
           </a:xfrm>
           <a:prstGeom prst="rect">
             <a:avLst/>
@@ -3745,8 +3856,8 @@
         </p:nvSpPr>
         <p:spPr>
           <a:xfrm>
-            <a:off x="4526280" y="1325880"/>
-            <a:ext cx="3154680" cy="548640"/>
+            <a:off x="4526280" y="978407"/>
+            <a:ext cx="3154680" cy="502920"/>
           </a:xfrm>
           <a:prstGeom prst="rect">
             <a:avLst/>
@@ -3761,12 +3872,12 @@
           <a:p>
             <a:pPr algn="l"/>
             <a:r>
-              <a:rPr sz="1200" b="0">
+              <a:rPr sz="1100" b="0">
                 <a:solidFill>
                   <a:srgbClr val="8A93A6"/>
                 </a:solidFill>
               </a:rPr>
-              <a:t>Reserve-Optimization Value</a:t>
+              <a:t>Annualized (ASSUMPTION, 12x/yr)</a:t>
             </a:r>
           </a:p>
         </p:txBody>
@@ -3779,8 +3890,8 @@
         </p:nvSpPr>
         <p:spPr>
           <a:xfrm>
-            <a:off x="4526280" y="1874519"/>
-            <a:ext cx="3154680" cy="822960"/>
+            <a:off x="4526280" y="1463040"/>
+            <a:ext cx="3154680" cy="731520"/>
           </a:xfrm>
           <a:prstGeom prst="rect">
             <a:avLst/>
@@ -3795,12 +3906,12 @@
           <a:p>
             <a:pPr algn="l"/>
             <a:r>
-              <a:rPr sz="2400" b="1">
+              <a:rPr sz="2100" b="1">
                 <a:solidFill>
-                  <a:srgbClr val="8A93A6"/>
+                  <a:srgbClr val="C9A227"/>
                 </a:solidFill>
               </a:rPr>
-              <a:t>$4,617,593</a:t>
+              <a:t>$5.19B</a:t>
             </a:r>
           </a:p>
         </p:txBody>
@@ -3813,8 +3924,8 @@
         </p:nvSpPr>
         <p:spPr>
           <a:xfrm>
-            <a:off x="8138160" y="1188720"/>
-            <a:ext cx="3520440" cy="2011680"/>
+            <a:off x="8138160" y="868680"/>
+            <a:ext cx="3520440" cy="1600200"/>
           </a:xfrm>
           <a:prstGeom prst="rect">
             <a:avLst/>
@@ -3856,8 +3967,8 @@
         </p:nvSpPr>
         <p:spPr>
           <a:xfrm>
-            <a:off x="8321040" y="1325880"/>
-            <a:ext cx="3154680" cy="548640"/>
+            <a:off x="8321040" y="978407"/>
+            <a:ext cx="3154680" cy="502920"/>
           </a:xfrm>
           <a:prstGeom prst="rect">
             <a:avLst/>
@@ -3872,12 +3983,12 @@
           <a:p>
             <a:pPr algn="l"/>
             <a:r>
-              <a:rPr sz="1200" b="0">
+              <a:rPr sz="1100" b="0">
                 <a:solidFill>
                   <a:srgbClr val="8A93A6"/>
                 </a:solidFill>
               </a:rPr>
-              <a:t>Production-Recommended Problems</a:t>
+              <a:t>5-Year Projected (ASSUMPTION)</a:t>
             </a:r>
           </a:p>
         </p:txBody>
@@ -3890,8 +4001,8 @@
         </p:nvSpPr>
         <p:spPr>
           <a:xfrm>
-            <a:off x="8321040" y="1874519"/>
-            <a:ext cx="3154680" cy="822960"/>
+            <a:off x="8321040" y="1463040"/>
+            <a:ext cx="3154680" cy="731520"/>
           </a:xfrm>
           <a:prstGeom prst="rect">
             <a:avLst/>
@@ -3906,12 +4017,12 @@
           <a:p>
             <a:pPr algn="l"/>
             <a:r>
-              <a:rPr sz="2400" b="1">
+              <a:rPr sz="2100" b="1">
                 <a:solidFill>
-                  <a:srgbClr val="16A34A"/>
+                  <a:srgbClr val="C9A227"/>
                 </a:solidFill>
               </a:rPr>
-              <a:t>10 of 13</a:t>
+              <a:t>$25.93B</a:t>
             </a:r>
           </a:p>
         </p:txBody>
@@ -3924,8 +4035,8 @@
         </p:nvSpPr>
         <p:spPr>
           <a:xfrm>
-            <a:off x="548640" y="3474720"/>
-            <a:ext cx="3520440" cy="2011680"/>
+            <a:off x="548640" y="2606039"/>
+            <a:ext cx="3520440" cy="1600200"/>
           </a:xfrm>
           <a:prstGeom prst="rect">
             <a:avLst/>
@@ -3967,8 +4078,8 @@
         </p:nvSpPr>
         <p:spPr>
           <a:xfrm>
-            <a:off x="731520" y="3611879"/>
-            <a:ext cx="3154680" cy="548640"/>
+            <a:off x="731520" y="2715768"/>
+            <a:ext cx="3154680" cy="502920"/>
           </a:xfrm>
           <a:prstGeom prst="rect">
             <a:avLst/>
@@ -3983,12 +4094,12 @@
           <a:p>
             <a:pPr algn="l"/>
             <a:r>
-              <a:rPr sz="1200" b="0">
+              <a:rPr sz="1100" b="0">
                 <a:solidFill>
                   <a:srgbClr val="8A93A6"/>
                 </a:solidFill>
               </a:rPr>
-              <a:t>Excluded Problems</a:t>
+              <a:t>Reserve-Optimization Value</a:t>
             </a:r>
           </a:p>
         </p:txBody>
@@ -4001,8 +4112,8 @@
         </p:nvSpPr>
         <p:spPr>
           <a:xfrm>
-            <a:off x="731520" y="4160520"/>
-            <a:ext cx="3154680" cy="822960"/>
+            <a:off x="731520" y="3200399"/>
+            <a:ext cx="3154680" cy="731520"/>
           </a:xfrm>
           <a:prstGeom prst="rect">
             <a:avLst/>
@@ -4017,12 +4128,12 @@
           <a:p>
             <a:pPr algn="l"/>
             <a:r>
-              <a:rPr sz="2400" b="1">
+              <a:rPr sz="2100" b="1">
                 <a:solidFill>
-                  <a:srgbClr val="C41E3A"/>
+                  <a:srgbClr val="8A93A6"/>
                 </a:solidFill>
               </a:rPr>
-              <a:t>3 of 13</a:t>
+              <a:t>$4.62M</a:t>
             </a:r>
           </a:p>
         </p:txBody>
@@ -4035,8 +4146,8 @@
         </p:nvSpPr>
         <p:spPr>
           <a:xfrm>
-            <a:off x="4343400" y="3474720"/>
-            <a:ext cx="3520440" cy="2011680"/>
+            <a:off x="4343400" y="2606039"/>
+            <a:ext cx="3520440" cy="1600200"/>
           </a:xfrm>
           <a:prstGeom prst="rect">
             <a:avLst/>
@@ -4078,8 +4189,8 @@
         </p:nvSpPr>
         <p:spPr>
           <a:xfrm>
-            <a:off x="4526280" y="3611879"/>
-            <a:ext cx="3154680" cy="548640"/>
+            <a:off x="4526280" y="2715768"/>
+            <a:ext cx="3154680" cy="502920"/>
           </a:xfrm>
           <a:prstGeom prst="rect">
             <a:avLst/>
@@ -4094,12 +4205,12 @@
           <a:p>
             <a:pPr algn="l"/>
             <a:r>
-              <a:rPr sz="1200" b="0">
+              <a:rPr sz="1100" b="0">
                 <a:solidFill>
                   <a:srgbClr val="8A93A6"/>
                 </a:solidFill>
               </a:rPr>
-              <a:t>This Notebook's Own Net Benefit / Cycle</a:t>
+              <a:t>Production-Recommended Problems</a:t>
             </a:r>
           </a:p>
         </p:txBody>
@@ -4112,8 +4223,8 @@
         </p:nvSpPr>
         <p:spPr>
           <a:xfrm>
-            <a:off x="4526280" y="4160520"/>
-            <a:ext cx="3154680" cy="822960"/>
+            <a:off x="4526280" y="3200399"/>
+            <a:ext cx="3154680" cy="731520"/>
           </a:xfrm>
           <a:prstGeom prst="rect">
             <a:avLst/>
@@ -4128,12 +4239,12 @@
           <a:p>
             <a:pPr algn="l"/>
             <a:r>
-              <a:rPr sz="2400" b="1">
+              <a:rPr sz="2100" b="1">
                 <a:solidFill>
-                  <a:srgbClr val="C9A227"/>
+                  <a:srgbClr val="16A34A"/>
                 </a:solidFill>
               </a:rPr>
-              <a:t>$3,562</a:t>
+              <a:t>10 of 13</a:t>
             </a:r>
           </a:p>
         </p:txBody>
@@ -4146,8 +4257,8 @@
         </p:nvSpPr>
         <p:spPr>
           <a:xfrm>
-            <a:off x="8138160" y="3474720"/>
-            <a:ext cx="3520440" cy="2011680"/>
+            <a:off x="8138160" y="2606039"/>
+            <a:ext cx="3520440" cy="1600200"/>
           </a:xfrm>
           <a:prstGeom prst="rect">
             <a:avLst/>
@@ -4189,8 +4300,8 @@
         </p:nvSpPr>
         <p:spPr>
           <a:xfrm>
-            <a:off x="8321040" y="3611879"/>
-            <a:ext cx="3154680" cy="548640"/>
+            <a:off x="8321040" y="2715768"/>
+            <a:ext cx="3154680" cy="502920"/>
           </a:xfrm>
           <a:prstGeom prst="rect">
             <a:avLst/>
@@ -4205,7 +4316,229 @@
           <a:p>
             <a:pPr algn="l"/>
             <a:r>
-              <a:rPr sz="1200" b="0">
+              <a:rPr sz="1100" b="0">
+                <a:solidFill>
+                  <a:srgbClr val="8A93A6"/>
+                </a:solidFill>
+              </a:rPr>
+              <a:t>Excluded Problems</a:t>
+            </a:r>
+          </a:p>
+        </p:txBody>
+      </p:sp>
+      <p:sp>
+        <p:nvSpPr>
+          <p:cNvPr id="20" name="TextBox 19"/>
+          <p:cNvSpPr txBox="1"/>
+          <p:nvPr/>
+        </p:nvSpPr>
+        <p:spPr>
+          <a:xfrm>
+            <a:off x="8321040" y="3200399"/>
+            <a:ext cx="3154680" cy="731520"/>
+          </a:xfrm>
+          <a:prstGeom prst="rect">
+            <a:avLst/>
+          </a:prstGeom>
+          <a:noFill/>
+        </p:spPr>
+        <p:txBody>
+          <a:bodyPr wrap="square">
+            <a:spAutoFit/>
+          </a:bodyPr>
+          <a:lstStyle/>
+          <a:p>
+            <a:pPr algn="l"/>
+            <a:r>
+              <a:rPr sz="2100" b="1">
+                <a:solidFill>
+                  <a:srgbClr val="C41E3A"/>
+                </a:solidFill>
+              </a:rPr>
+              <a:t>3 of 13</a:t>
+            </a:r>
+          </a:p>
+        </p:txBody>
+      </p:sp>
+      <p:sp>
+        <p:nvSpPr>
+          <p:cNvPr id="21" name="Rectangle 20"/>
+          <p:cNvSpPr/>
+          <p:nvPr/>
+        </p:nvSpPr>
+        <p:spPr>
+          <a:xfrm>
+            <a:off x="548640" y="4343400"/>
+            <a:ext cx="3520440" cy="1600200"/>
+          </a:xfrm>
+          <a:prstGeom prst="rect">
+            <a:avLst/>
+          </a:prstGeom>
+          <a:solidFill>
+            <a:srgbClr val="F2F4F8"/>
+          </a:solidFill>
+          <a:ln>
+            <a:noFill/>
+          </a:ln>
+        </p:spPr>
+        <p:style>
+          <a:lnRef idx="1">
+            <a:schemeClr val="accent1"/>
+          </a:lnRef>
+          <a:fillRef idx="3">
+            <a:schemeClr val="accent1"/>
+          </a:fillRef>
+          <a:effectRef idx="2">
+            <a:schemeClr val="accent1"/>
+          </a:effectRef>
+          <a:fontRef idx="minor">
+            <a:schemeClr val="lt1"/>
+          </a:fontRef>
+        </p:style>
+        <p:txBody>
+          <a:bodyPr rtlCol="0" anchor="ctr"/>
+          <a:lstStyle/>
+          <a:p>
+            <a:pPr algn="ctr"/>
+          </a:p>
+        </p:txBody>
+      </p:sp>
+      <p:sp>
+        <p:nvSpPr>
+          <p:cNvPr id="22" name="TextBox 21"/>
+          <p:cNvSpPr txBox="1"/>
+          <p:nvPr/>
+        </p:nvSpPr>
+        <p:spPr>
+          <a:xfrm>
+            <a:off x="731520" y="4453128"/>
+            <a:ext cx="3154680" cy="502920"/>
+          </a:xfrm>
+          <a:prstGeom prst="rect">
+            <a:avLst/>
+          </a:prstGeom>
+          <a:noFill/>
+        </p:spPr>
+        <p:txBody>
+          <a:bodyPr wrap="square">
+            <a:spAutoFit/>
+          </a:bodyPr>
+          <a:lstStyle/>
+          <a:p>
+            <a:pPr algn="l"/>
+            <a:r>
+              <a:rPr sz="1100" b="0">
+                <a:solidFill>
+                  <a:srgbClr val="8A93A6"/>
+                </a:solidFill>
+              </a:rPr>
+              <a:t>This Notebook's Own Net Benefit / Cycle</a:t>
+            </a:r>
+          </a:p>
+        </p:txBody>
+      </p:sp>
+      <p:sp>
+        <p:nvSpPr>
+          <p:cNvPr id="23" name="TextBox 22"/>
+          <p:cNvSpPr txBox="1"/>
+          <p:nvPr/>
+        </p:nvSpPr>
+        <p:spPr>
+          <a:xfrm>
+            <a:off x="731520" y="4937760"/>
+            <a:ext cx="3154680" cy="731520"/>
+          </a:xfrm>
+          <a:prstGeom prst="rect">
+            <a:avLst/>
+          </a:prstGeom>
+          <a:noFill/>
+        </p:spPr>
+        <p:txBody>
+          <a:bodyPr wrap="square">
+            <a:spAutoFit/>
+          </a:bodyPr>
+          <a:lstStyle/>
+          <a:p>
+            <a:pPr algn="l"/>
+            <a:r>
+              <a:rPr sz="2100" b="1">
+                <a:solidFill>
+                  <a:srgbClr val="C9A227"/>
+                </a:solidFill>
+              </a:rPr>
+              <a:t>$3.56K</a:t>
+            </a:r>
+          </a:p>
+        </p:txBody>
+      </p:sp>
+      <p:sp>
+        <p:nvSpPr>
+          <p:cNvPr id="24" name="Rectangle 23"/>
+          <p:cNvSpPr/>
+          <p:nvPr/>
+        </p:nvSpPr>
+        <p:spPr>
+          <a:xfrm>
+            <a:off x="4343400" y="4343400"/>
+            <a:ext cx="3520440" cy="1600200"/>
+          </a:xfrm>
+          <a:prstGeom prst="rect">
+            <a:avLst/>
+          </a:prstGeom>
+          <a:solidFill>
+            <a:srgbClr val="F2F4F8"/>
+          </a:solidFill>
+          <a:ln>
+            <a:noFill/>
+          </a:ln>
+        </p:spPr>
+        <p:style>
+          <a:lnRef idx="1">
+            <a:schemeClr val="accent1"/>
+          </a:lnRef>
+          <a:fillRef idx="3">
+            <a:schemeClr val="accent1"/>
+          </a:fillRef>
+          <a:effectRef idx="2">
+            <a:schemeClr val="accent1"/>
+          </a:effectRef>
+          <a:fontRef idx="minor">
+            <a:schemeClr val="lt1"/>
+          </a:fontRef>
+        </p:style>
+        <p:txBody>
+          <a:bodyPr rtlCol="0" anchor="ctr"/>
+          <a:lstStyle/>
+          <a:p>
+            <a:pPr algn="ctr"/>
+          </a:p>
+        </p:txBody>
+      </p:sp>
+      <p:sp>
+        <p:nvSpPr>
+          <p:cNvPr id="25" name="TextBox 24"/>
+          <p:cNvSpPr txBox="1"/>
+          <p:nvPr/>
+        </p:nvSpPr>
+        <p:spPr>
+          <a:xfrm>
+            <a:off x="4526280" y="4453128"/>
+            <a:ext cx="3154680" cy="502920"/>
+          </a:xfrm>
+          <a:prstGeom prst="rect">
+            <a:avLst/>
+          </a:prstGeom>
+          <a:noFill/>
+        </p:spPr>
+        <p:txBody>
+          <a:bodyPr wrap="square">
+            <a:spAutoFit/>
+          </a:bodyPr>
+          <a:lstStyle/>
+          <a:p>
+            <a:pPr algn="l"/>
+            <a:r>
+              <a:rPr sz="1100" b="0">
                 <a:solidFill>
                   <a:srgbClr val="8A93A6"/>
                 </a:solidFill>
@@ -4217,14 +4550,14 @@
       </p:sp>
       <p:sp>
         <p:nvSpPr>
-          <p:cNvPr id="20" name="TextBox 19"/>
+          <p:cNvPr id="26" name="TextBox 25"/>
           <p:cNvSpPr txBox="1"/>
           <p:nvPr/>
         </p:nvSpPr>
         <p:spPr>
           <a:xfrm>
-            <a:off x="8321040" y="4160520"/>
-            <a:ext cx="3154680" cy="822960"/>
+            <a:off x="4526280" y="4937760"/>
+            <a:ext cx="3154680" cy="731520"/>
           </a:xfrm>
           <a:prstGeom prst="rect">
             <a:avLst/>
@@ -4239,12 +4572,46 @@
           <a:p>
             <a:pPr algn="l"/>
             <a:r>
-              <a:rPr sz="2400" b="1">
+              <a:rPr sz="2100" b="1">
                 <a:solidFill>
                   <a:srgbClr val="16A34A"/>
                 </a:solidFill>
               </a:rPr>
               <a:t>RECOMMENDED</a:t>
+            </a:r>
+          </a:p>
+        </p:txBody>
+      </p:sp>
+      <p:sp>
+        <p:nvSpPr>
+          <p:cNvPr id="27" name="TextBox 26"/>
+          <p:cNvSpPr txBox="1"/>
+          <p:nvPr/>
+        </p:nvSpPr>
+        <p:spPr>
+          <a:xfrm>
+            <a:off x="548640" y="6126479"/>
+            <a:ext cx="11064240" cy="274320"/>
+          </a:xfrm>
+          <a:prstGeom prst="rect">
+            <a:avLst/>
+          </a:prstGeom>
+          <a:noFill/>
+        </p:spPr>
+        <p:txBody>
+          <a:bodyPr wrap="square">
+            <a:spAutoFit/>
+          </a:bodyPr>
+          <a:lstStyle/>
+          <a:p>
+            <a:pPr algn="l"/>
+            <a:r>
+              <a:rPr sz="850" b="0">
+                <a:solidFill>
+                  <a:srgbClr val="8A93A6"/>
+                </a:solidFill>
+              </a:rPr>
+              <a:t>ASSUMPTION: projects the current real $$432.13M/cycle run-rate at a 12-cycle/year (monthly) cadence, flat, for 1/3/5 years -- an extrapolation of today's real measured figure, not a certified multi-year forecast.</a:t>
             </a:r>
           </a:p>
         </p:txBody>
@@ -4668,7 +5035,7 @@
                         <a:defRPr sz="950"/>
                       </a:pPr>
                       <a:r>
-                        <a:t>$4,617,593</a:t>
+                        <a:t>$4.62M</a:t>
                       </a:r>
                     </a:p>
                   </a:txBody>
@@ -4753,7 +5120,7 @@
                         <a:defRPr sz="950"/>
                       </a:pPr>
                       <a:r>
-                        <a:t>$9,690,840</a:t>
+                        <a:t>$9.69M</a:t>
                       </a:r>
                     </a:p>
                   </a:txBody>
@@ -4838,7 +5205,7 @@
                         <a:defRPr sz="950"/>
                       </a:pPr>
                       <a:r>
-                        <a:t>$4,898,250</a:t>
+                        <a:t>$4.90M</a:t>
                       </a:r>
                     </a:p>
                   </a:txBody>
@@ -4923,7 +5290,7 @@
                         <a:defRPr sz="950"/>
                       </a:pPr>
                       <a:r>
-                        <a:t>$8,491,170</a:t>
+                        <a:t>$8.49M</a:t>
                       </a:r>
                     </a:p>
                   </a:txBody>
@@ -5008,7 +5375,7 @@
                         <a:defRPr sz="950"/>
                       </a:pPr>
                       <a:r>
-                        <a:t>$2,912,145</a:t>
+                        <a:t>$2.91M</a:t>
                       </a:r>
                     </a:p>
                   </a:txBody>
@@ -5093,7 +5460,7 @@
                         <a:defRPr sz="950"/>
                       </a:pPr>
                       <a:r>
-                        <a:t>$315,820</a:t>
+                        <a:t>$315.82K</a:t>
                       </a:r>
                     </a:p>
                   </a:txBody>
@@ -5178,7 +5545,7 @@
                         <a:defRPr sz="950"/>
                       </a:pPr>
                       <a:r>
-                        <a:t>$341,908,210</a:t>
+                        <a:t>$341.91M</a:t>
                       </a:r>
                     </a:p>
                   </a:txBody>
@@ -5263,7 +5630,7 @@
                         <a:defRPr sz="950"/>
                       </a:pPr>
                       <a:r>
-                        <a:t>$2,206,596</a:t>
+                        <a:t>$2.21M</a:t>
                       </a:r>
                     </a:p>
                   </a:txBody>
@@ -5348,7 +5715,7 @@
                         <a:defRPr sz="950"/>
                       </a:pPr>
                       <a:r>
-                        <a:t>$2,374,108</a:t>
+                        <a:t>$2.37M</a:t>
                       </a:r>
                     </a:p>
                   </a:txBody>
@@ -5433,7 +5800,7 @@
                         <a:defRPr sz="950"/>
                       </a:pPr>
                       <a:r>
-                        <a:t>$1,275,022</a:t>
+                        <a:t>$1.28M</a:t>
                       </a:r>
                     </a:p>
                   </a:txBody>
@@ -5518,7 +5885,7 @@
                         <a:defRPr sz="950"/>
                       </a:pPr>
                       <a:r>
-                        <a:t>$58,060,688</a:t>
+                        <a:t>$58.06M</a:t>
                       </a:r>
                     </a:p>
                   </a:txBody>

--- a/00_Executive_Rollup_Report/AMEX_RiskIQ_Platform_Executive_Rollup_Deck.pptx
+++ b/00_Executive_Rollup_Report/AMEX_RiskIQ_Platform_Executive_Rollup_Deck.pptx
@@ -3236,7 +3236,7 @@
                   <a:srgbClr val="8A93A6"/>
                 </a:solidFill>
               </a:rPr>
-              <a:t>Generated: 2026-09-16 12:02</a:t>
+              <a:t>Generated: 2026-09-16 12:32</a:t>
             </a:r>
           </a:p>
         </p:txBody>
